--- a/docs/who-is-human-발표-10분.pptx
+++ b/docs/who-is-human-발표-10분.pptx
@@ -6409,7 +6409,7 @@
                 <a:ea typeface="Apple SD Gothic Neo" pitchFamily="34" charset="-122"/>
                 <a:cs typeface="Apple SD Gothic Neo" pitchFamily="34" charset="-120"/>
               </a:rPr>
-              <a:t>세 주제어를 한 줄로 꿰었다</a:t>
+              <a:t>키워드를 이렇게 풀었다</a:t>
             </a:r>
             <a:endParaRPr lang="en-US" sz="2600" dirty="0"/>
           </a:p>
@@ -6641,7 +6641,7 @@
                 <a:ea typeface="Apple SD Gothic Neo" pitchFamily="34" charset="-122"/>
                 <a:cs typeface="Apple SD Gothic Neo" pitchFamily="34" charset="-120"/>
               </a:rPr>
-              <a:t>「AI 가 사람과 구별되지 않는 첫해」</a:t>
+              <a:t>미군기지는 축소하고 인공지능에는 표시 의무된 2026년</a:t>
             </a:r>
             <a:endParaRPr lang="en-US" sz="1100" dirty="0"/>
           </a:p>
@@ -6830,7 +6830,7 @@
                 <a:ea typeface="Apple SD Gothic Neo" pitchFamily="34" charset="-122"/>
                 <a:cs typeface="Apple SD Gothic Neo" pitchFamily="34" charset="-120"/>
               </a:rPr>
-              <a:t>중력(낙하 생존) · 마찰과 배속(움직이는 발판) · 회전과 마찰(회전 원판). 조건은 도중에 바뀌고 값은 비공개다. 사람은 바뀐 직후 흔들리고, 기계는 처음부터 평평하다.</a:t>
+              <a:t>중력(낙하 생존) · 마찰과 배속(움직이는 발판) · 회전과 마찰(회전 원판).</a:t>
             </a:r>
             <a:endParaRPr lang="en-US" sz="1100" dirty="0"/>
           </a:p>
@@ -7791,7 +7791,7 @@
                 <a:ea typeface="Apple SD Gothic Neo" pitchFamily="34" charset="-122"/>
                 <a:cs typeface="Apple SD Gothic Neo" pitchFamily="34" charset="-120"/>
               </a:rPr>
-              <a:t>배역 받기 7초</a:t>
+              <a:t>배역 통보 7초</a:t>
             </a:r>
             <a:endParaRPr lang="en-US" sz="1100" dirty="0"/>
           </a:p>
@@ -9305,7 +9305,7 @@
                 <a:ea typeface="Apple SD Gothic Neo" pitchFamily="34" charset="-122"/>
                 <a:cs typeface="Apple SD Gothic Neo" pitchFamily="34" charset="-120"/>
               </a:rPr>
-              <a:t>AI 설계자 — 0~2</a:t>
+              <a:t>AI 설계자 — 1~2</a:t>
             </a:r>
             <a:endParaRPr lang="en-US" sz="1300" dirty="0"/>
           </a:p>
@@ -9367,7 +9367,7 @@
                 <a:ea typeface="Apple SD Gothic Neo" pitchFamily="34" charset="-122"/>
                 <a:cs typeface="Apple SD Gothic Neo" pitchFamily="34" charset="-120"/>
               </a:rPr>
-              <a:t>목표: 의심을 다른 곳으로 돌려 AI 와 자신을 살린다. 기록 조작 1회 — 한 명의 다음 기록을 「튀게」·「평범하게」.</a:t>
+              <a:t>목표: 의심을 다른 곳으로 돌려 AI 와 자신을 모두 살린다 — 인간이 검출되게 만든다.</a:t>
             </a:r>
             <a:endParaRPr lang="en-US" sz="1100" dirty="0"/>
           </a:p>
@@ -10594,7 +10594,7 @@
                 <a:ea typeface="Apple SD Gothic Neo" pitchFamily="34" charset="-122"/>
                 <a:cs typeface="Apple SD Gothic Neo" pitchFamily="34" charset="-120"/>
               </a:rPr>
-              <a:t>조건은 20초마다 바뀌고 값은 클라이언트로 내려가지 않는다</a:t>
+              <a:t>조건은 도중에 계속 바뀌고 값은 클라이언트로 내려가지 않는다</a:t>
             </a:r>
             <a:endParaRPr lang="en-US" sz="1250" dirty="0"/>
           </a:p>
@@ -10642,7 +10642,7 @@
                 <a:ea typeface="Apple SD Gothic Neo" pitchFamily="34" charset="-122"/>
                 <a:cs typeface="Apple SD Gothic Neo" pitchFamily="34" charset="-120"/>
               </a:rPr>
-              <a:t>버틴 시간만큼 발언권을 받는다 — 시험 성적이 곧 다음 대화의 말수</a:t>
+              <a:t>시험 등수에 따라 발언권을 차등해 받는다 — 시험 성적이 곧 다음 대화의 말수</a:t>
             </a:r>
             <a:endParaRPr lang="en-US" sz="1250" dirty="0"/>
           </a:p>
